--- a/ai/src/ppt dataset/Blue Simple Geometric Project Presentation.pptx
+++ b/ai/src/ppt dataset/Blue Simple Geometric Project Presentation.pptx
@@ -3138,6 +3138,10 @@
             </a:stretch>
           </a:blipFill>
         </p:spPr>
+        <p:txBody>
+          <a:bodyPr/>
+          <a:p/>
+        </p:txBody>
       </p:sp>
       <p:sp>
         <p:nvSpPr>
@@ -3190,6 +3194,10 @@
             </a:stretch>
           </a:blipFill>
         </p:spPr>
+        <p:txBody>
+          <a:bodyPr/>
+          <a:p/>
+        </p:txBody>
       </p:sp>
       <p:sp>
         <p:nvSpPr>
@@ -3242,6 +3250,10 @@
             </a:stretch>
           </a:blipFill>
         </p:spPr>
+        <p:txBody>
+          <a:bodyPr/>
+          <a:p/>
+        </p:txBody>
       </p:sp>
       <p:sp>
         <p:nvSpPr>
@@ -3294,6 +3306,10 @@
             </a:stretch>
           </a:blipFill>
         </p:spPr>
+        <p:txBody>
+          <a:bodyPr/>
+          <a:p/>
+        </p:txBody>
       </p:sp>
       <p:sp>
         <p:nvSpPr>
@@ -3346,6 +3362,10 @@
             </a:stretch>
           </a:blipFill>
         </p:spPr>
+        <p:txBody>
+          <a:bodyPr/>
+          <a:p/>
+        </p:txBody>
       </p:sp>
       <p:sp>
         <p:nvSpPr>
@@ -3398,6 +3418,10 @@
             </a:stretch>
           </a:blipFill>
         </p:spPr>
+        <p:txBody>
+          <a:bodyPr/>
+          <a:p/>
+        </p:txBody>
       </p:sp>
       <p:sp>
         <p:nvSpPr>
@@ -3450,6 +3474,10 @@
             </a:stretch>
           </a:blipFill>
         </p:spPr>
+        <p:txBody>
+          <a:bodyPr/>
+          <a:p/>
+        </p:txBody>
       </p:sp>
       <p:sp>
         <p:nvSpPr>
@@ -3502,6 +3530,10 @@
             </a:stretch>
           </a:blipFill>
         </p:spPr>
+        <p:txBody>
+          <a:bodyPr/>
+          <a:p/>
+        </p:txBody>
       </p:sp>
       <p:sp>
         <p:nvSpPr>
@@ -3523,25 +3555,7 @@
             <a:spAutoFit/>
           </a:bodyPr>
           <a:lstStyle/>
-          <a:p>
-            <a:pPr algn="ctr">
-              <a:lnSpc>
-                <a:spcPts val="11106"/>
-              </a:lnSpc>
-            </a:pPr>
-            <a:r>
-              <a:rPr lang="en-US" b="true" sz="12479">
-                <a:solidFill>
-                  <a:srgbClr val="034697"/>
-                </a:solidFill>
-                <a:latin typeface="Futura Bold"/>
-                <a:ea typeface="Futura Bold"/>
-                <a:cs typeface="Futura Bold"/>
-                <a:sym typeface="Futura Bold"/>
-              </a:rPr>
-              <a:t>PROJECT PRESENTATION</a:t>
-            </a:r>
-          </a:p>
+          <a:p/>
         </p:txBody>
       </p:sp>
       <p:sp>
@@ -3564,25 +3578,7 @@
             <a:spAutoFit/>
           </a:bodyPr>
           <a:lstStyle/>
-          <a:p>
-            <a:pPr algn="ctr">
-              <a:lnSpc>
-                <a:spcPts val="3699"/>
-              </a:lnSpc>
-            </a:pPr>
-            <a:r>
-              <a:rPr lang="en-US" sz="3699">
-                <a:solidFill>
-                  <a:srgbClr val="034697"/>
-                </a:solidFill>
-                <a:latin typeface="Varela Round"/>
-                <a:ea typeface="Varela Round"/>
-                <a:cs typeface="Varela Round"/>
-                <a:sym typeface="Varela Round"/>
-              </a:rPr>
-              <a:t>Presented by Borcelle Group</a:t>
-            </a:r>
-          </a:p>
+          <a:p/>
         </p:txBody>
       </p:sp>
     </p:spTree>
@@ -3668,6 +3664,10 @@
             </a:stretch>
           </a:blipFill>
         </p:spPr>
+        <p:txBody>
+          <a:bodyPr/>
+          <a:p/>
+        </p:txBody>
       </p:sp>
       <p:sp>
         <p:nvSpPr>
@@ -3720,6 +3720,10 @@
             </a:stretch>
           </a:blipFill>
         </p:spPr>
+        <p:txBody>
+          <a:bodyPr/>
+          <a:p/>
+        </p:txBody>
       </p:sp>
       <p:sp>
         <p:nvSpPr>
@@ -3772,6 +3776,10 @@
             </a:stretch>
           </a:blipFill>
         </p:spPr>
+        <p:txBody>
+          <a:bodyPr/>
+          <a:p/>
+        </p:txBody>
       </p:sp>
       <p:sp>
         <p:nvSpPr>
@@ -3824,6 +3832,10 @@
             </a:stretch>
           </a:blipFill>
         </p:spPr>
+        <p:txBody>
+          <a:bodyPr/>
+          <a:p/>
+        </p:txBody>
       </p:sp>
       <p:sp>
         <p:nvSpPr>
@@ -3876,6 +3888,10 @@
             </a:stretch>
           </a:blipFill>
         </p:spPr>
+        <p:txBody>
+          <a:bodyPr/>
+          <a:p/>
+        </p:txBody>
       </p:sp>
       <p:sp>
         <p:nvSpPr>
@@ -3928,6 +3944,10 @@
             </a:stretch>
           </a:blipFill>
         </p:spPr>
+        <p:txBody>
+          <a:bodyPr/>
+          <a:p/>
+        </p:txBody>
       </p:sp>
       <p:sp>
         <p:nvSpPr>
@@ -3980,6 +4000,10 @@
             </a:stretch>
           </a:blipFill>
         </p:spPr>
+        <p:txBody>
+          <a:bodyPr/>
+          <a:p/>
+        </p:txBody>
       </p:sp>
       <p:sp>
         <p:nvSpPr>
@@ -4032,6 +4056,10 @@
             </a:stretch>
           </a:blipFill>
         </p:spPr>
+        <p:txBody>
+          <a:bodyPr/>
+          <a:p/>
+        </p:txBody>
       </p:sp>
       <p:sp>
         <p:nvSpPr>
@@ -4053,25 +4081,7 @@
             <a:spAutoFit/>
           </a:bodyPr>
           <a:lstStyle/>
-          <a:p>
-            <a:pPr algn="ctr">
-              <a:lnSpc>
-                <a:spcPts val="7531"/>
-              </a:lnSpc>
-            </a:pPr>
-            <a:r>
-              <a:rPr lang="en-US" b="true" sz="8462">
-                <a:solidFill>
-                  <a:srgbClr val="034697"/>
-                </a:solidFill>
-                <a:latin typeface="Futura Bold"/>
-                <a:ea typeface="Futura Bold"/>
-                <a:cs typeface="Futura Bold"/>
-                <a:sym typeface="Futura Bold"/>
-              </a:rPr>
-              <a:t>ANALYSIS</a:t>
-            </a:r>
-          </a:p>
+          <a:p/>
         </p:txBody>
       </p:sp>
       <p:sp>
@@ -4094,51 +4104,9 @@
             <a:spAutoFit/>
           </a:bodyPr>
           <a:lstStyle/>
-          <a:p>
-            <a:pPr algn="l">
-              <a:lnSpc>
-                <a:spcPts val="4480"/>
-              </a:lnSpc>
-            </a:pPr>
-            <a:r>
-              <a:rPr lang="en-US" sz="3200">
-                <a:solidFill>
-                  <a:srgbClr val="034697"/>
-                </a:solidFill>
-                <a:latin typeface="Varela Round"/>
-                <a:ea typeface="Varela Round"/>
-                <a:cs typeface="Varela Round"/>
-                <a:sym typeface="Varela Round"/>
-              </a:rPr>
-              <a:t>Lorem ipsum dolor sit amet, consectetur adipiscing elit, sed do eiusmod tempor incididunt ut labore et dolore magna aliqua. Ut enim ad minim veniam, quis nostrud exercitation ullamco laboris nisi ut aliquip ex ea commodo consequat.</a:t>
-            </a:r>
-          </a:p>
-        </p:txBody>
-      </p:sp>
-      <p:pic>
-        <p:nvPicPr>
-          <p:cNvPr name="Picture 12" id="12"/>
-          <p:cNvPicPr>
-            <a:picLocks noChangeAspect="true"/>
-          </p:cNvPicPr>
-          <p:nvPr/>
-        </p:nvPicPr>
-        <p:blipFill>
-          <a:blip r:embed="rId10"/>
-          <a:stretch>
-            <a:fillRect/>
-          </a:stretch>
-        </p:blipFill>
-        <p:spPr>
-          <a:xfrm rot="0">
-            <a:off x="9057981" y="3198250"/>
-            <a:ext cx="7139687" cy="5604468"/>
-          </a:xfrm>
-          <a:prstGeom prst="rect">
-            <a:avLst/>
-          </a:prstGeom>
-        </p:spPr>
-      </p:pic>
+          <a:p/>
+        </p:txBody>
+      </p:sp>
     </p:spTree>
   </p:cSld>
   <p:clrMapOvr>
@@ -4222,6 +4190,10 @@
             </a:stretch>
           </a:blipFill>
         </p:spPr>
+        <p:txBody>
+          <a:bodyPr/>
+          <a:p/>
+        </p:txBody>
       </p:sp>
       <p:sp>
         <p:nvSpPr>
@@ -4274,6 +4246,10 @@
             </a:stretch>
           </a:blipFill>
         </p:spPr>
+        <p:txBody>
+          <a:bodyPr/>
+          <a:p/>
+        </p:txBody>
       </p:sp>
       <p:sp>
         <p:nvSpPr>
@@ -4326,6 +4302,10 @@
             </a:stretch>
           </a:blipFill>
         </p:spPr>
+        <p:txBody>
+          <a:bodyPr/>
+          <a:p/>
+        </p:txBody>
       </p:sp>
       <p:sp>
         <p:nvSpPr>
@@ -4378,6 +4358,10 @@
             </a:stretch>
           </a:blipFill>
         </p:spPr>
+        <p:txBody>
+          <a:bodyPr/>
+          <a:p/>
+        </p:txBody>
       </p:sp>
       <p:sp>
         <p:nvSpPr>
@@ -4430,6 +4414,10 @@
             </a:stretch>
           </a:blipFill>
         </p:spPr>
+        <p:txBody>
+          <a:bodyPr/>
+          <a:p/>
+        </p:txBody>
       </p:sp>
       <p:sp>
         <p:nvSpPr>
@@ -4482,6 +4470,10 @@
             </a:stretch>
           </a:blipFill>
         </p:spPr>
+        <p:txBody>
+          <a:bodyPr/>
+          <a:p/>
+        </p:txBody>
       </p:sp>
       <p:sp>
         <p:nvSpPr>
@@ -4534,6 +4526,10 @@
             </a:stretch>
           </a:blipFill>
         </p:spPr>
+        <p:txBody>
+          <a:bodyPr/>
+          <a:p/>
+        </p:txBody>
       </p:sp>
       <p:sp>
         <p:nvSpPr>
@@ -4586,6 +4582,10 @@
             </a:stretch>
           </a:blipFill>
         </p:spPr>
+        <p:txBody>
+          <a:bodyPr/>
+          <a:p/>
+        </p:txBody>
       </p:sp>
       <p:sp>
         <p:nvSpPr>
@@ -4607,25 +4607,7 @@
             <a:spAutoFit/>
           </a:bodyPr>
           <a:lstStyle/>
-          <a:p>
-            <a:pPr algn="ctr">
-              <a:lnSpc>
-                <a:spcPts val="7531"/>
-              </a:lnSpc>
-            </a:pPr>
-            <a:r>
-              <a:rPr lang="en-US" b="true" sz="8462">
-                <a:solidFill>
-                  <a:srgbClr val="034697"/>
-                </a:solidFill>
-                <a:latin typeface="Futura Bold"/>
-                <a:ea typeface="Futura Bold"/>
-                <a:cs typeface="Futura Bold"/>
-                <a:sym typeface="Futura Bold"/>
-              </a:rPr>
-              <a:t>CONCLUSION</a:t>
-            </a:r>
-          </a:p>
+          <a:p/>
         </p:txBody>
       </p:sp>
       <p:sp>
@@ -4648,25 +4630,7 @@
             <a:spAutoFit/>
           </a:bodyPr>
           <a:lstStyle/>
-          <a:p>
-            <a:pPr algn="ctr">
-              <a:lnSpc>
-                <a:spcPts val="4480"/>
-              </a:lnSpc>
-            </a:pPr>
-            <a:r>
-              <a:rPr lang="en-US" sz="3200">
-                <a:solidFill>
-                  <a:srgbClr val="034697"/>
-                </a:solidFill>
-                <a:latin typeface="Varela Round"/>
-                <a:ea typeface="Varela Round"/>
-                <a:cs typeface="Varela Round"/>
-                <a:sym typeface="Varela Round"/>
-              </a:rPr>
-              <a:t>Lorem ipsum dolor sit amet, consectetur adipiscing elit, sed do eiusmod tempor incididunt ut labore et dolore magna aliqua. Ut enim ad minim veniam, quis nostrud exercitation ullamco laboris nisi ut aliquip ex ea commodo consequat. Duis aute irure dolor in reprehenderit in voluptate velit esse cillum dolore eu fugiat nulla pariatur. Excepteur sint occaecat cupidatat non proident, sunt in culpa qui officia deserunt mollit anim id est laborum</a:t>
-            </a:r>
-          </a:p>
+          <a:p/>
         </p:txBody>
       </p:sp>
     </p:spTree>
@@ -4752,6 +4716,10 @@
             </a:stretch>
           </a:blipFill>
         </p:spPr>
+        <p:txBody>
+          <a:bodyPr/>
+          <a:p/>
+        </p:txBody>
       </p:sp>
       <p:sp>
         <p:nvSpPr>
@@ -4804,6 +4772,10 @@
             </a:stretch>
           </a:blipFill>
         </p:spPr>
+        <p:txBody>
+          <a:bodyPr/>
+          <a:p/>
+        </p:txBody>
       </p:sp>
       <p:sp>
         <p:nvSpPr>
@@ -4856,6 +4828,10 @@
             </a:stretch>
           </a:blipFill>
         </p:spPr>
+        <p:txBody>
+          <a:bodyPr/>
+          <a:p/>
+        </p:txBody>
       </p:sp>
       <p:sp>
         <p:nvSpPr>
@@ -4908,6 +4884,10 @@
             </a:stretch>
           </a:blipFill>
         </p:spPr>
+        <p:txBody>
+          <a:bodyPr/>
+          <a:p/>
+        </p:txBody>
       </p:sp>
       <p:sp>
         <p:nvSpPr>
@@ -4960,6 +4940,10 @@
             </a:stretch>
           </a:blipFill>
         </p:spPr>
+        <p:txBody>
+          <a:bodyPr/>
+          <a:p/>
+        </p:txBody>
       </p:sp>
       <p:sp>
         <p:nvSpPr>
@@ -5012,6 +4996,10 @@
             </a:stretch>
           </a:blipFill>
         </p:spPr>
+        <p:txBody>
+          <a:bodyPr/>
+          <a:p/>
+        </p:txBody>
       </p:sp>
       <p:sp>
         <p:nvSpPr>
@@ -5064,6 +5052,10 @@
             </a:stretch>
           </a:blipFill>
         </p:spPr>
+        <p:txBody>
+          <a:bodyPr/>
+          <a:p/>
+        </p:txBody>
       </p:sp>
       <p:sp>
         <p:nvSpPr>
@@ -5116,6 +5108,10 @@
             </a:stretch>
           </a:blipFill>
         </p:spPr>
+        <p:txBody>
+          <a:bodyPr/>
+          <a:p/>
+        </p:txBody>
       </p:sp>
       <p:sp>
         <p:nvSpPr>
@@ -5137,44 +5133,7 @@
             <a:spAutoFit/>
           </a:bodyPr>
           <a:lstStyle/>
-          <a:p>
-            <a:pPr algn="ctr">
-              <a:lnSpc>
-                <a:spcPts val="11106"/>
-              </a:lnSpc>
-            </a:pPr>
-            <a:r>
-              <a:rPr lang="en-US" b="true" sz="12479">
-                <a:solidFill>
-                  <a:srgbClr val="034697"/>
-                </a:solidFill>
-                <a:latin typeface="Futura Bold"/>
-                <a:ea typeface="Futura Bold"/>
-                <a:cs typeface="Futura Bold"/>
-                <a:sym typeface="Futura Bold"/>
-              </a:rPr>
-              <a:t>THANK</a:t>
-            </a:r>
-          </a:p>
-          <a:p>
-            <a:pPr algn="ctr">
-              <a:lnSpc>
-                <a:spcPts val="11106"/>
-              </a:lnSpc>
-            </a:pPr>
-            <a:r>
-              <a:rPr lang="en-US" b="true" sz="12479">
-                <a:solidFill>
-                  <a:srgbClr val="034697"/>
-                </a:solidFill>
-                <a:latin typeface="Futura Bold"/>
-                <a:ea typeface="Futura Bold"/>
-                <a:cs typeface="Futura Bold"/>
-                <a:sym typeface="Futura Bold"/>
-              </a:rPr>
-              <a:t>YOU</a:t>
-            </a:r>
-          </a:p>
+          <a:p/>
         </p:txBody>
       </p:sp>
     </p:spTree>
@@ -5260,6 +5219,10 @@
             </a:stretch>
           </a:blipFill>
         </p:spPr>
+        <p:txBody>
+          <a:bodyPr/>
+          <a:p/>
+        </p:txBody>
       </p:sp>
       <p:sp>
         <p:nvSpPr>
@@ -5312,6 +5275,10 @@
             </a:stretch>
           </a:blipFill>
         </p:spPr>
+        <p:txBody>
+          <a:bodyPr/>
+          <a:p/>
+        </p:txBody>
       </p:sp>
       <p:sp>
         <p:nvSpPr>
@@ -5364,6 +5331,10 @@
             </a:stretch>
           </a:blipFill>
         </p:spPr>
+        <p:txBody>
+          <a:bodyPr/>
+          <a:p/>
+        </p:txBody>
       </p:sp>
       <p:sp>
         <p:nvSpPr>
@@ -5416,6 +5387,10 @@
             </a:stretch>
           </a:blipFill>
         </p:spPr>
+        <p:txBody>
+          <a:bodyPr/>
+          <a:p/>
+        </p:txBody>
       </p:sp>
       <p:sp>
         <p:nvSpPr>
@@ -5468,6 +5443,10 @@
             </a:stretch>
           </a:blipFill>
         </p:spPr>
+        <p:txBody>
+          <a:bodyPr/>
+          <a:p/>
+        </p:txBody>
       </p:sp>
       <p:sp>
         <p:nvSpPr>
@@ -5520,6 +5499,10 @@
             </a:stretch>
           </a:blipFill>
         </p:spPr>
+        <p:txBody>
+          <a:bodyPr/>
+          <a:p/>
+        </p:txBody>
       </p:sp>
       <p:sp>
         <p:nvSpPr>
@@ -5572,6 +5555,10 @@
             </a:stretch>
           </a:blipFill>
         </p:spPr>
+        <p:txBody>
+          <a:bodyPr/>
+          <a:p/>
+        </p:txBody>
       </p:sp>
       <p:sp>
         <p:nvSpPr>
@@ -5624,6 +5611,10 @@
             </a:stretch>
           </a:blipFill>
         </p:spPr>
+        <p:txBody>
+          <a:bodyPr/>
+          <a:p/>
+        </p:txBody>
       </p:sp>
       <p:sp>
         <p:nvSpPr>
@@ -5645,25 +5636,7 @@
             <a:spAutoFit/>
           </a:bodyPr>
           <a:lstStyle/>
-          <a:p>
-            <a:pPr algn="ctr">
-              <a:lnSpc>
-                <a:spcPts val="7531"/>
-              </a:lnSpc>
-            </a:pPr>
-            <a:r>
-              <a:rPr lang="en-US" b="true" sz="8462">
-                <a:solidFill>
-                  <a:srgbClr val="034697"/>
-                </a:solidFill>
-                <a:latin typeface="Futura Bold"/>
-                <a:ea typeface="Futura Bold"/>
-                <a:cs typeface="Futura Bold"/>
-                <a:sym typeface="Futura Bold"/>
-              </a:rPr>
-              <a:t>OUR TEAM</a:t>
-            </a:r>
-          </a:p>
+          <a:p/>
         </p:txBody>
       </p:sp>
       <p:grpSp>
@@ -5755,25 +5728,7 @@
             <a:spAutoFit/>
           </a:bodyPr>
           <a:lstStyle/>
-          <a:p>
-            <a:pPr algn="ctr">
-              <a:lnSpc>
-                <a:spcPts val="3200"/>
-              </a:lnSpc>
-            </a:pPr>
-            <a:r>
-              <a:rPr lang="en-US" sz="3200">
-                <a:solidFill>
-                  <a:srgbClr val="034697"/>
-                </a:solidFill>
-                <a:latin typeface="Varela Round"/>
-                <a:ea typeface="Varela Round"/>
-                <a:cs typeface="Varela Round"/>
-                <a:sym typeface="Varela Round"/>
-              </a:rPr>
-              <a:t>Hannah Morales</a:t>
-            </a:r>
-          </a:p>
+          <a:p/>
         </p:txBody>
       </p:sp>
       <p:grpSp>
@@ -5865,25 +5820,7 @@
             <a:spAutoFit/>
           </a:bodyPr>
           <a:lstStyle/>
-          <a:p>
-            <a:pPr algn="ctr">
-              <a:lnSpc>
-                <a:spcPts val="3200"/>
-              </a:lnSpc>
-            </a:pPr>
-            <a:r>
-              <a:rPr lang="en-US" sz="3200">
-                <a:solidFill>
-                  <a:srgbClr val="034697"/>
-                </a:solidFill>
-                <a:latin typeface="Varela Round"/>
-                <a:ea typeface="Varela Round"/>
-                <a:cs typeface="Varela Round"/>
-                <a:sym typeface="Varela Round"/>
-              </a:rPr>
-              <a:t>Samira Hadid</a:t>
-            </a:r>
-          </a:p>
+          <a:p/>
         </p:txBody>
       </p:sp>
       <p:grpSp>
@@ -5975,25 +5912,7 @@
             <a:spAutoFit/>
           </a:bodyPr>
           <a:lstStyle/>
-          <a:p>
-            <a:pPr algn="ctr">
-              <a:lnSpc>
-                <a:spcPts val="3200"/>
-              </a:lnSpc>
-            </a:pPr>
-            <a:r>
-              <a:rPr lang="en-US" sz="3200">
-                <a:solidFill>
-                  <a:srgbClr val="034697"/>
-                </a:solidFill>
-                <a:latin typeface="Varela Round"/>
-                <a:ea typeface="Varela Round"/>
-                <a:cs typeface="Varela Round"/>
-                <a:sym typeface="Varela Round"/>
-              </a:rPr>
-              <a:t>Juliana Silva</a:t>
-            </a:r>
-          </a:p>
+          <a:p/>
         </p:txBody>
       </p:sp>
     </p:spTree>
@@ -6079,6 +5998,10 @@
             </a:stretch>
           </a:blipFill>
         </p:spPr>
+        <p:txBody>
+          <a:bodyPr/>
+          <a:p/>
+        </p:txBody>
       </p:sp>
       <p:sp>
         <p:nvSpPr>
@@ -6131,6 +6054,10 @@
             </a:stretch>
           </a:blipFill>
         </p:spPr>
+        <p:txBody>
+          <a:bodyPr/>
+          <a:p/>
+        </p:txBody>
       </p:sp>
       <p:sp>
         <p:nvSpPr>
@@ -6183,6 +6110,10 @@
             </a:stretch>
           </a:blipFill>
         </p:spPr>
+        <p:txBody>
+          <a:bodyPr/>
+          <a:p/>
+        </p:txBody>
       </p:sp>
       <p:sp>
         <p:nvSpPr>
@@ -6235,6 +6166,10 @@
             </a:stretch>
           </a:blipFill>
         </p:spPr>
+        <p:txBody>
+          <a:bodyPr/>
+          <a:p/>
+        </p:txBody>
       </p:sp>
       <p:sp>
         <p:nvSpPr>
@@ -6287,6 +6222,10 @@
             </a:stretch>
           </a:blipFill>
         </p:spPr>
+        <p:txBody>
+          <a:bodyPr/>
+          <a:p/>
+        </p:txBody>
       </p:sp>
       <p:sp>
         <p:nvSpPr>
@@ -6339,6 +6278,10 @@
             </a:stretch>
           </a:blipFill>
         </p:spPr>
+        <p:txBody>
+          <a:bodyPr/>
+          <a:p/>
+        </p:txBody>
       </p:sp>
       <p:sp>
         <p:nvSpPr>
@@ -6391,6 +6334,10 @@
             </a:stretch>
           </a:blipFill>
         </p:spPr>
+        <p:txBody>
+          <a:bodyPr/>
+          <a:p/>
+        </p:txBody>
       </p:sp>
       <p:sp>
         <p:nvSpPr>
@@ -6443,6 +6390,10 @@
             </a:stretch>
           </a:blipFill>
         </p:spPr>
+        <p:txBody>
+          <a:bodyPr/>
+          <a:p/>
+        </p:txBody>
       </p:sp>
       <p:sp>
         <p:nvSpPr>
@@ -6464,25 +6415,7 @@
             <a:spAutoFit/>
           </a:bodyPr>
           <a:lstStyle/>
-          <a:p>
-            <a:pPr algn="ctr">
-              <a:lnSpc>
-                <a:spcPts val="7531"/>
-              </a:lnSpc>
-            </a:pPr>
-            <a:r>
-              <a:rPr lang="en-US" b="true" sz="8462">
-                <a:solidFill>
-                  <a:srgbClr val="034697"/>
-                </a:solidFill>
-                <a:latin typeface="Futura Bold"/>
-                <a:ea typeface="Futura Bold"/>
-                <a:cs typeface="Futura Bold"/>
-                <a:sym typeface="Futura Bold"/>
-              </a:rPr>
-              <a:t>INTRODUCTION</a:t>
-            </a:r>
-          </a:p>
+          <a:p/>
         </p:txBody>
       </p:sp>
       <p:sp>
@@ -6505,25 +6438,7 @@
             <a:spAutoFit/>
           </a:bodyPr>
           <a:lstStyle/>
-          <a:p>
-            <a:pPr algn="ctr">
-              <a:lnSpc>
-                <a:spcPts val="4480"/>
-              </a:lnSpc>
-            </a:pPr>
-            <a:r>
-              <a:rPr lang="en-US" sz="3200">
-                <a:solidFill>
-                  <a:srgbClr val="034697"/>
-                </a:solidFill>
-                <a:latin typeface="Varela Round"/>
-                <a:ea typeface="Varela Round"/>
-                <a:cs typeface="Varela Round"/>
-                <a:sym typeface="Varela Round"/>
-              </a:rPr>
-              <a:t>Lorem ipsum dolor sit amet, consectetur adipiscing elit, sed do eiusmod tempor incididunt ut labore et dolore magna aliqua. Ut enim ad minim veniam, quis nostrud exercitation ullamco laboris nisi ut aliquip ex ea commodo consequat. Duis aute irure dolor in reprehenderit in voluptate velit esse cillum dolore eu fugiat nulla pariatur. Excepteur sint occaecat cupidatat non proident, sunt in culpa qui officia deserunt mollit anim id est laborum</a:t>
-            </a:r>
-          </a:p>
+          <a:p/>
         </p:txBody>
       </p:sp>
     </p:spTree>
@@ -6609,6 +6524,10 @@
             </a:stretch>
           </a:blipFill>
         </p:spPr>
+        <p:txBody>
+          <a:bodyPr/>
+          <a:p/>
+        </p:txBody>
       </p:sp>
       <p:sp>
         <p:nvSpPr>
@@ -6661,6 +6580,10 @@
             </a:stretch>
           </a:blipFill>
         </p:spPr>
+        <p:txBody>
+          <a:bodyPr/>
+          <a:p/>
+        </p:txBody>
       </p:sp>
       <p:sp>
         <p:nvSpPr>
@@ -6713,6 +6636,10 @@
             </a:stretch>
           </a:blipFill>
         </p:spPr>
+        <p:txBody>
+          <a:bodyPr/>
+          <a:p/>
+        </p:txBody>
       </p:sp>
       <p:sp>
         <p:nvSpPr>
@@ -6765,6 +6692,10 @@
             </a:stretch>
           </a:blipFill>
         </p:spPr>
+        <p:txBody>
+          <a:bodyPr/>
+          <a:p/>
+        </p:txBody>
       </p:sp>
       <p:sp>
         <p:nvSpPr>
@@ -6817,6 +6748,10 @@
             </a:stretch>
           </a:blipFill>
         </p:spPr>
+        <p:txBody>
+          <a:bodyPr/>
+          <a:p/>
+        </p:txBody>
       </p:sp>
       <p:sp>
         <p:nvSpPr>
@@ -6869,6 +6804,10 @@
             </a:stretch>
           </a:blipFill>
         </p:spPr>
+        <p:txBody>
+          <a:bodyPr/>
+          <a:p/>
+        </p:txBody>
       </p:sp>
       <p:sp>
         <p:nvSpPr>
@@ -6921,6 +6860,10 @@
             </a:stretch>
           </a:blipFill>
         </p:spPr>
+        <p:txBody>
+          <a:bodyPr/>
+          <a:p/>
+        </p:txBody>
       </p:sp>
       <p:sp>
         <p:nvSpPr>
@@ -6973,6 +6916,10 @@
             </a:stretch>
           </a:blipFill>
         </p:spPr>
+        <p:txBody>
+          <a:bodyPr/>
+          <a:p/>
+        </p:txBody>
       </p:sp>
       <p:sp>
         <p:nvSpPr>
@@ -6994,25 +6941,7 @@
             <a:spAutoFit/>
           </a:bodyPr>
           <a:lstStyle/>
-          <a:p>
-            <a:pPr algn="ctr">
-              <a:lnSpc>
-                <a:spcPts val="7531"/>
-              </a:lnSpc>
-            </a:pPr>
-            <a:r>
-              <a:rPr lang="en-US" b="true" sz="8462">
-                <a:solidFill>
-                  <a:srgbClr val="034697"/>
-                </a:solidFill>
-                <a:latin typeface="Futura Bold"/>
-                <a:ea typeface="Futura Bold"/>
-                <a:cs typeface="Futura Bold"/>
-                <a:sym typeface="Futura Bold"/>
-              </a:rPr>
-              <a:t>BACKGROUND</a:t>
-            </a:r>
-          </a:p>
+          <a:p/>
         </p:txBody>
       </p:sp>
       <p:sp>
@@ -7035,25 +6964,7 @@
             <a:spAutoFit/>
           </a:bodyPr>
           <a:lstStyle/>
-          <a:p>
-            <a:pPr algn="l">
-              <a:lnSpc>
-                <a:spcPts val="4480"/>
-              </a:lnSpc>
-            </a:pPr>
-            <a:r>
-              <a:rPr lang="en-US" sz="3200">
-                <a:solidFill>
-                  <a:srgbClr val="034697"/>
-                </a:solidFill>
-                <a:latin typeface="Varela Round"/>
-                <a:ea typeface="Varela Round"/>
-                <a:cs typeface="Varela Round"/>
-                <a:sym typeface="Varela Round"/>
-              </a:rPr>
-              <a:t>Lorem ipsum dolor sit amet, consectetur adipiscing elit, sed do eiusmod tempor incididunt ut labore et dolore magna aliqua. Ut enim ad minim veniam, quis nostrud exercitation ullamco laboris nisi ut aliquip ex ea commodo consequat.</a:t>
-            </a:r>
-          </a:p>
+          <a:p/>
         </p:txBody>
       </p:sp>
       <p:sp>
@@ -7076,25 +6987,7 @@
             <a:spAutoFit/>
           </a:bodyPr>
           <a:lstStyle/>
-          <a:p>
-            <a:pPr algn="l">
-              <a:lnSpc>
-                <a:spcPts val="4480"/>
-              </a:lnSpc>
-            </a:pPr>
-            <a:r>
-              <a:rPr lang="en-US" sz="3200">
-                <a:solidFill>
-                  <a:srgbClr val="034697"/>
-                </a:solidFill>
-                <a:latin typeface="Varela Round"/>
-                <a:ea typeface="Varela Round"/>
-                <a:cs typeface="Varela Round"/>
-                <a:sym typeface="Varela Round"/>
-              </a:rPr>
-              <a:t>Lorem ipsum dolor sit amet, consectetur adipiscing elit, sed do eiusmod tempor incididunt ut labore et dolore magna aliqua. Ut enim ad minim veniam, quis nostrud exercitation ullamco laboris nisi ut aliquip ex ea commodo consequat.</a:t>
-            </a:r>
-          </a:p>
+          <a:p/>
         </p:txBody>
       </p:sp>
     </p:spTree>
@@ -7180,6 +7073,10 @@
             </a:stretch>
           </a:blipFill>
         </p:spPr>
+        <p:txBody>
+          <a:bodyPr/>
+          <a:p/>
+        </p:txBody>
       </p:sp>
       <p:sp>
         <p:nvSpPr>
@@ -7232,6 +7129,10 @@
             </a:stretch>
           </a:blipFill>
         </p:spPr>
+        <p:txBody>
+          <a:bodyPr/>
+          <a:p/>
+        </p:txBody>
       </p:sp>
       <p:sp>
         <p:nvSpPr>
@@ -7284,6 +7185,10 @@
             </a:stretch>
           </a:blipFill>
         </p:spPr>
+        <p:txBody>
+          <a:bodyPr/>
+          <a:p/>
+        </p:txBody>
       </p:sp>
       <p:sp>
         <p:nvSpPr>
@@ -7336,6 +7241,10 @@
             </a:stretch>
           </a:blipFill>
         </p:spPr>
+        <p:txBody>
+          <a:bodyPr/>
+          <a:p/>
+        </p:txBody>
       </p:sp>
       <p:sp>
         <p:nvSpPr>
@@ -7388,6 +7297,10 @@
             </a:stretch>
           </a:blipFill>
         </p:spPr>
+        <p:txBody>
+          <a:bodyPr/>
+          <a:p/>
+        </p:txBody>
       </p:sp>
       <p:sp>
         <p:nvSpPr>
@@ -7440,6 +7353,10 @@
             </a:stretch>
           </a:blipFill>
         </p:spPr>
+        <p:txBody>
+          <a:bodyPr/>
+          <a:p/>
+        </p:txBody>
       </p:sp>
       <p:sp>
         <p:nvSpPr>
@@ -7492,6 +7409,10 @@
             </a:stretch>
           </a:blipFill>
         </p:spPr>
+        <p:txBody>
+          <a:bodyPr/>
+          <a:p/>
+        </p:txBody>
       </p:sp>
       <p:sp>
         <p:nvSpPr>
@@ -7544,6 +7465,10 @@
             </a:stretch>
           </a:blipFill>
         </p:spPr>
+        <p:txBody>
+          <a:bodyPr/>
+          <a:p/>
+        </p:txBody>
       </p:sp>
       <p:sp>
         <p:nvSpPr>
@@ -7565,25 +7490,7 @@
             <a:spAutoFit/>
           </a:bodyPr>
           <a:lstStyle/>
-          <a:p>
-            <a:pPr algn="ctr">
-              <a:lnSpc>
-                <a:spcPts val="7531"/>
-              </a:lnSpc>
-            </a:pPr>
-            <a:r>
-              <a:rPr lang="en-US" b="true" sz="8462">
-                <a:solidFill>
-                  <a:srgbClr val="034697"/>
-                </a:solidFill>
-                <a:latin typeface="Futura Bold"/>
-                <a:ea typeface="Futura Bold"/>
-                <a:cs typeface="Futura Bold"/>
-                <a:sym typeface="Futura Bold"/>
-              </a:rPr>
-              <a:t>PROBLEMS</a:t>
-            </a:r>
-          </a:p>
+          <a:p/>
         </p:txBody>
       </p:sp>
       <p:sp>
@@ -7606,25 +7513,7 @@
             <a:spAutoFit/>
           </a:bodyPr>
           <a:lstStyle/>
-          <a:p>
-            <a:pPr algn="l">
-              <a:lnSpc>
-                <a:spcPts val="4480"/>
-              </a:lnSpc>
-            </a:pPr>
-            <a:r>
-              <a:rPr lang="en-US" sz="3200">
-                <a:solidFill>
-                  <a:srgbClr val="034697"/>
-                </a:solidFill>
-                <a:latin typeface="Varela Round"/>
-                <a:ea typeface="Varela Round"/>
-                <a:cs typeface="Varela Round"/>
-                <a:sym typeface="Varela Round"/>
-              </a:rPr>
-              <a:t>Lorem ipsum dolor sit amet, consectetur adipiscing elit, sed do eiusmod tempor incididunt ut labore et dolore magna aliqua.</a:t>
-            </a:r>
-          </a:p>
+          <a:p/>
         </p:txBody>
       </p:sp>
       <p:sp>
@@ -7647,25 +7536,7 @@
             <a:spAutoFit/>
           </a:bodyPr>
           <a:lstStyle/>
-          <a:p>
-            <a:pPr algn="ctr">
-              <a:lnSpc>
-                <a:spcPts val="5426"/>
-              </a:lnSpc>
-            </a:pPr>
-            <a:r>
-              <a:rPr lang="en-US" b="true" sz="6096">
-                <a:solidFill>
-                  <a:srgbClr val="034697"/>
-                </a:solidFill>
-                <a:latin typeface="Futura Bold"/>
-                <a:ea typeface="Futura Bold"/>
-                <a:cs typeface="Futura Bold"/>
-                <a:sym typeface="Futura Bold"/>
-              </a:rPr>
-              <a:t>1.</a:t>
-            </a:r>
-          </a:p>
+          <a:p/>
         </p:txBody>
       </p:sp>
       <p:sp>
@@ -7688,25 +7559,7 @@
             <a:spAutoFit/>
           </a:bodyPr>
           <a:lstStyle/>
-          <a:p>
-            <a:pPr algn="l">
-              <a:lnSpc>
-                <a:spcPts val="4480"/>
-              </a:lnSpc>
-            </a:pPr>
-            <a:r>
-              <a:rPr lang="en-US" sz="3200">
-                <a:solidFill>
-                  <a:srgbClr val="034697"/>
-                </a:solidFill>
-                <a:latin typeface="Varela Round"/>
-                <a:ea typeface="Varela Round"/>
-                <a:cs typeface="Varela Round"/>
-                <a:sym typeface="Varela Round"/>
-              </a:rPr>
-              <a:t>Lorem ipsum dolor sit amet, consectetur adipiscing elit, sed do eiusmod tempor incididunt ut labore et dolore magna aliqua.</a:t>
-            </a:r>
-          </a:p>
+          <a:p/>
         </p:txBody>
       </p:sp>
       <p:sp>
@@ -7729,25 +7582,7 @@
             <a:spAutoFit/>
           </a:bodyPr>
           <a:lstStyle/>
-          <a:p>
-            <a:pPr algn="ctr">
-              <a:lnSpc>
-                <a:spcPts val="5426"/>
-              </a:lnSpc>
-            </a:pPr>
-            <a:r>
-              <a:rPr lang="en-US" b="true" sz="6096">
-                <a:solidFill>
-                  <a:srgbClr val="034697"/>
-                </a:solidFill>
-                <a:latin typeface="Futura Bold"/>
-                <a:ea typeface="Futura Bold"/>
-                <a:cs typeface="Futura Bold"/>
-                <a:sym typeface="Futura Bold"/>
-              </a:rPr>
-              <a:t>2.</a:t>
-            </a:r>
-          </a:p>
+          <a:p/>
         </p:txBody>
       </p:sp>
       <p:sp>
@@ -7770,25 +7605,7 @@
             <a:spAutoFit/>
           </a:bodyPr>
           <a:lstStyle/>
-          <a:p>
-            <a:pPr algn="l">
-              <a:lnSpc>
-                <a:spcPts val="4480"/>
-              </a:lnSpc>
-            </a:pPr>
-            <a:r>
-              <a:rPr lang="en-US" sz="3200">
-                <a:solidFill>
-                  <a:srgbClr val="034697"/>
-                </a:solidFill>
-                <a:latin typeface="Varela Round"/>
-                <a:ea typeface="Varela Round"/>
-                <a:cs typeface="Varela Round"/>
-                <a:sym typeface="Varela Round"/>
-              </a:rPr>
-              <a:t>Lorem ipsum dolor sit amet, consectetur adipiscing elit, sed do eiusmod tempor incididunt ut labore et dolore magna aliqua.</a:t>
-            </a:r>
-          </a:p>
+          <a:p/>
         </p:txBody>
       </p:sp>
       <p:sp>
@@ -7811,25 +7628,7 @@
             <a:spAutoFit/>
           </a:bodyPr>
           <a:lstStyle/>
-          <a:p>
-            <a:pPr algn="ctr">
-              <a:lnSpc>
-                <a:spcPts val="5426"/>
-              </a:lnSpc>
-            </a:pPr>
-            <a:r>
-              <a:rPr lang="en-US" b="true" sz="6096">
-                <a:solidFill>
-                  <a:srgbClr val="034697"/>
-                </a:solidFill>
-                <a:latin typeface="Futura Bold"/>
-                <a:ea typeface="Futura Bold"/>
-                <a:cs typeface="Futura Bold"/>
-                <a:sym typeface="Futura Bold"/>
-              </a:rPr>
-              <a:t>3.</a:t>
-            </a:r>
-          </a:p>
+          <a:p/>
         </p:txBody>
       </p:sp>
     </p:spTree>
@@ -7915,6 +7714,10 @@
             </a:stretch>
           </a:blipFill>
         </p:spPr>
+        <p:txBody>
+          <a:bodyPr/>
+          <a:p/>
+        </p:txBody>
       </p:sp>
       <p:sp>
         <p:nvSpPr>
@@ -7967,6 +7770,10 @@
             </a:stretch>
           </a:blipFill>
         </p:spPr>
+        <p:txBody>
+          <a:bodyPr/>
+          <a:p/>
+        </p:txBody>
       </p:sp>
       <p:sp>
         <p:nvSpPr>
@@ -8019,6 +7826,10 @@
             </a:stretch>
           </a:blipFill>
         </p:spPr>
+        <p:txBody>
+          <a:bodyPr/>
+          <a:p/>
+        </p:txBody>
       </p:sp>
       <p:sp>
         <p:nvSpPr>
@@ -8071,6 +7882,10 @@
             </a:stretch>
           </a:blipFill>
         </p:spPr>
+        <p:txBody>
+          <a:bodyPr/>
+          <a:p/>
+        </p:txBody>
       </p:sp>
       <p:sp>
         <p:nvSpPr>
@@ -8123,6 +7938,10 @@
             </a:stretch>
           </a:blipFill>
         </p:spPr>
+        <p:txBody>
+          <a:bodyPr/>
+          <a:p/>
+        </p:txBody>
       </p:sp>
       <p:sp>
         <p:nvSpPr>
@@ -8175,6 +7994,10 @@
             </a:stretch>
           </a:blipFill>
         </p:spPr>
+        <p:txBody>
+          <a:bodyPr/>
+          <a:p/>
+        </p:txBody>
       </p:sp>
       <p:sp>
         <p:nvSpPr>
@@ -8227,6 +8050,10 @@
             </a:stretch>
           </a:blipFill>
         </p:spPr>
+        <p:txBody>
+          <a:bodyPr/>
+          <a:p/>
+        </p:txBody>
       </p:sp>
       <p:sp>
         <p:nvSpPr>
@@ -8279,6 +8106,10 @@
             </a:stretch>
           </a:blipFill>
         </p:spPr>
+        <p:txBody>
+          <a:bodyPr/>
+          <a:p/>
+        </p:txBody>
       </p:sp>
       <p:sp>
         <p:nvSpPr>
@@ -8300,25 +8131,7 @@
             <a:spAutoFit/>
           </a:bodyPr>
           <a:lstStyle/>
-          <a:p>
-            <a:pPr algn="ctr">
-              <a:lnSpc>
-                <a:spcPts val="7531"/>
-              </a:lnSpc>
-            </a:pPr>
-            <a:r>
-              <a:rPr lang="en-US" b="true" sz="8462">
-                <a:solidFill>
-                  <a:srgbClr val="034697"/>
-                </a:solidFill>
-                <a:latin typeface="Futura Bold"/>
-                <a:ea typeface="Futura Bold"/>
-                <a:cs typeface="Futura Bold"/>
-                <a:sym typeface="Futura Bold"/>
-              </a:rPr>
-              <a:t>GOALS</a:t>
-            </a:r>
-          </a:p>
+          <a:p/>
         </p:txBody>
       </p:sp>
       <p:sp>
@@ -8341,25 +8154,7 @@
             <a:spAutoFit/>
           </a:bodyPr>
           <a:lstStyle/>
-          <a:p>
-            <a:pPr algn="l">
-              <a:lnSpc>
-                <a:spcPts val="4480"/>
-              </a:lnSpc>
-            </a:pPr>
-            <a:r>
-              <a:rPr lang="en-US" sz="3200">
-                <a:solidFill>
-                  <a:srgbClr val="034697"/>
-                </a:solidFill>
-                <a:latin typeface="Varela Round"/>
-                <a:ea typeface="Varela Round"/>
-                <a:cs typeface="Varela Round"/>
-                <a:sym typeface="Varela Round"/>
-              </a:rPr>
-              <a:t>Lorem ipsum dolor sit amet, consectetur adipiscing elit, sed do eiusmod tempor incididunt ut labore et dolore magna aliqua.</a:t>
-            </a:r>
-          </a:p>
+          <a:p/>
         </p:txBody>
       </p:sp>
       <p:sp>
@@ -8382,25 +8177,7 @@
             <a:spAutoFit/>
           </a:bodyPr>
           <a:lstStyle/>
-          <a:p>
-            <a:pPr algn="ctr">
-              <a:lnSpc>
-                <a:spcPts val="5426"/>
-              </a:lnSpc>
-            </a:pPr>
-            <a:r>
-              <a:rPr lang="en-US" b="true" sz="6096">
-                <a:solidFill>
-                  <a:srgbClr val="034697"/>
-                </a:solidFill>
-                <a:latin typeface="Futura Bold"/>
-                <a:ea typeface="Futura Bold"/>
-                <a:cs typeface="Futura Bold"/>
-                <a:sym typeface="Futura Bold"/>
-              </a:rPr>
-              <a:t>1.</a:t>
-            </a:r>
-          </a:p>
+          <a:p/>
         </p:txBody>
       </p:sp>
       <p:sp>
@@ -8423,25 +8200,7 @@
             <a:spAutoFit/>
           </a:bodyPr>
           <a:lstStyle/>
-          <a:p>
-            <a:pPr algn="l">
-              <a:lnSpc>
-                <a:spcPts val="4480"/>
-              </a:lnSpc>
-            </a:pPr>
-            <a:r>
-              <a:rPr lang="en-US" sz="3200">
-                <a:solidFill>
-                  <a:srgbClr val="034697"/>
-                </a:solidFill>
-                <a:latin typeface="Varela Round"/>
-                <a:ea typeface="Varela Round"/>
-                <a:cs typeface="Varela Round"/>
-                <a:sym typeface="Varela Round"/>
-              </a:rPr>
-              <a:t>Lorem ipsum dolor sit amet, consectetur adipiscing elit, sed do eiusmod tempor incididunt ut labore et dolore magna aliqua.</a:t>
-            </a:r>
-          </a:p>
+          <a:p/>
         </p:txBody>
       </p:sp>
       <p:sp>
@@ -8464,25 +8223,7 @@
             <a:spAutoFit/>
           </a:bodyPr>
           <a:lstStyle/>
-          <a:p>
-            <a:pPr algn="ctr">
-              <a:lnSpc>
-                <a:spcPts val="5426"/>
-              </a:lnSpc>
-            </a:pPr>
-            <a:r>
-              <a:rPr lang="en-US" b="true" sz="6096">
-                <a:solidFill>
-                  <a:srgbClr val="034697"/>
-                </a:solidFill>
-                <a:latin typeface="Futura Bold"/>
-                <a:ea typeface="Futura Bold"/>
-                <a:cs typeface="Futura Bold"/>
-                <a:sym typeface="Futura Bold"/>
-              </a:rPr>
-              <a:t>2.</a:t>
-            </a:r>
-          </a:p>
+          <a:p/>
         </p:txBody>
       </p:sp>
       <p:sp>
@@ -8505,25 +8246,7 @@
             <a:spAutoFit/>
           </a:bodyPr>
           <a:lstStyle/>
-          <a:p>
-            <a:pPr algn="l">
-              <a:lnSpc>
-                <a:spcPts val="4480"/>
-              </a:lnSpc>
-            </a:pPr>
-            <a:r>
-              <a:rPr lang="en-US" sz="3200">
-                <a:solidFill>
-                  <a:srgbClr val="034697"/>
-                </a:solidFill>
-                <a:latin typeface="Varela Round"/>
-                <a:ea typeface="Varela Round"/>
-                <a:cs typeface="Varela Round"/>
-                <a:sym typeface="Varela Round"/>
-              </a:rPr>
-              <a:t>Lorem ipsum dolor sit amet, consectetur adipiscing elit, sed do eiusmod tempor incididunt ut labore et dolore magna aliqua.</a:t>
-            </a:r>
-          </a:p>
+          <a:p/>
         </p:txBody>
       </p:sp>
       <p:sp>
@@ -8546,25 +8269,7 @@
             <a:spAutoFit/>
           </a:bodyPr>
           <a:lstStyle/>
-          <a:p>
-            <a:pPr algn="ctr">
-              <a:lnSpc>
-                <a:spcPts val="5426"/>
-              </a:lnSpc>
-            </a:pPr>
-            <a:r>
-              <a:rPr lang="en-US" b="true" sz="6096">
-                <a:solidFill>
-                  <a:srgbClr val="034697"/>
-                </a:solidFill>
-                <a:latin typeface="Futura Bold"/>
-                <a:ea typeface="Futura Bold"/>
-                <a:cs typeface="Futura Bold"/>
-                <a:sym typeface="Futura Bold"/>
-              </a:rPr>
-              <a:t>3.</a:t>
-            </a:r>
-          </a:p>
+          <a:p/>
         </p:txBody>
       </p:sp>
     </p:spTree>
@@ -8650,6 +8355,10 @@
             </a:stretch>
           </a:blipFill>
         </p:spPr>
+        <p:txBody>
+          <a:bodyPr/>
+          <a:p/>
+        </p:txBody>
       </p:sp>
       <p:sp>
         <p:nvSpPr>
@@ -8702,6 +8411,10 @@
             </a:stretch>
           </a:blipFill>
         </p:spPr>
+        <p:txBody>
+          <a:bodyPr/>
+          <a:p/>
+        </p:txBody>
       </p:sp>
       <p:sp>
         <p:nvSpPr>
@@ -8754,6 +8467,10 @@
             </a:stretch>
           </a:blipFill>
         </p:spPr>
+        <p:txBody>
+          <a:bodyPr/>
+          <a:p/>
+        </p:txBody>
       </p:sp>
       <p:sp>
         <p:nvSpPr>
@@ -8806,6 +8523,10 @@
             </a:stretch>
           </a:blipFill>
         </p:spPr>
+        <p:txBody>
+          <a:bodyPr/>
+          <a:p/>
+        </p:txBody>
       </p:sp>
       <p:sp>
         <p:nvSpPr>
@@ -8858,6 +8579,10 @@
             </a:stretch>
           </a:blipFill>
         </p:spPr>
+        <p:txBody>
+          <a:bodyPr/>
+          <a:p/>
+        </p:txBody>
       </p:sp>
       <p:sp>
         <p:nvSpPr>
@@ -8910,6 +8635,10 @@
             </a:stretch>
           </a:blipFill>
         </p:spPr>
+        <p:txBody>
+          <a:bodyPr/>
+          <a:p/>
+        </p:txBody>
       </p:sp>
       <p:sp>
         <p:nvSpPr>
@@ -8962,6 +8691,10 @@
             </a:stretch>
           </a:blipFill>
         </p:spPr>
+        <p:txBody>
+          <a:bodyPr/>
+          <a:p/>
+        </p:txBody>
       </p:sp>
       <p:sp>
         <p:nvSpPr>
@@ -9014,6 +8747,10 @@
             </a:stretch>
           </a:blipFill>
         </p:spPr>
+        <p:txBody>
+          <a:bodyPr/>
+          <a:p/>
+        </p:txBody>
       </p:sp>
       <p:sp>
         <p:nvSpPr>
@@ -9035,25 +8772,7 @@
             <a:spAutoFit/>
           </a:bodyPr>
           <a:lstStyle/>
-          <a:p>
-            <a:pPr algn="ctr">
-              <a:lnSpc>
-                <a:spcPts val="7531"/>
-              </a:lnSpc>
-            </a:pPr>
-            <a:r>
-              <a:rPr lang="en-US" b="true" sz="8462">
-                <a:solidFill>
-                  <a:srgbClr val="034697"/>
-                </a:solidFill>
-                <a:latin typeface="Futura Bold"/>
-                <a:ea typeface="Futura Bold"/>
-                <a:cs typeface="Futura Bold"/>
-                <a:sym typeface="Futura Bold"/>
-              </a:rPr>
-              <a:t>HYPOTHESIS 1</a:t>
-            </a:r>
-          </a:p>
+          <a:p/>
         </p:txBody>
       </p:sp>
       <p:sp>
@@ -9076,25 +8795,7 @@
             <a:spAutoFit/>
           </a:bodyPr>
           <a:lstStyle/>
-          <a:p>
-            <a:pPr algn="l">
-              <a:lnSpc>
-                <a:spcPts val="4480"/>
-              </a:lnSpc>
-            </a:pPr>
-            <a:r>
-              <a:rPr lang="en-US" sz="3200">
-                <a:solidFill>
-                  <a:srgbClr val="034697"/>
-                </a:solidFill>
-                <a:latin typeface="Varela Round"/>
-                <a:ea typeface="Varela Round"/>
-                <a:cs typeface="Varela Round"/>
-                <a:sym typeface="Varela Round"/>
-              </a:rPr>
-              <a:t>Lorem ipsum dolor sit amet, consectetur adipiscing elit, sed do eiusmod tempor incididunt ut labore et dolore magna aliqua. Ut enim ad minim veniam, quis nostrud exercitation ullamco laboris nisi ut aliquip ex ea commodo consequat.</a:t>
-            </a:r>
-          </a:p>
+          <a:p/>
         </p:txBody>
       </p:sp>
       <p:sp>
@@ -9117,25 +8818,7 @@
             <a:spAutoFit/>
           </a:bodyPr>
           <a:lstStyle/>
-          <a:p>
-            <a:pPr algn="l">
-              <a:lnSpc>
-                <a:spcPts val="4480"/>
-              </a:lnSpc>
-            </a:pPr>
-            <a:r>
-              <a:rPr lang="en-US" sz="3200">
-                <a:solidFill>
-                  <a:srgbClr val="034697"/>
-                </a:solidFill>
-                <a:latin typeface="Varela Round"/>
-                <a:ea typeface="Varela Round"/>
-                <a:cs typeface="Varela Round"/>
-                <a:sym typeface="Varela Round"/>
-              </a:rPr>
-              <a:t>Lorem ipsum dolor sit amet, consectetur adipiscing elit, sed do eiusmod tempor incididunt ut labore et dolore magna aliqua. Ut enim ad minim veniam, quis nostrud exercitation ullamco laboris nisi ut aliquip ex ea commodo consequat.</a:t>
-            </a:r>
-          </a:p>
+          <a:p/>
         </p:txBody>
       </p:sp>
     </p:spTree>
@@ -9221,6 +8904,10 @@
             </a:stretch>
           </a:blipFill>
         </p:spPr>
+        <p:txBody>
+          <a:bodyPr/>
+          <a:p/>
+        </p:txBody>
       </p:sp>
       <p:sp>
         <p:nvSpPr>
@@ -9273,6 +8960,10 @@
             </a:stretch>
           </a:blipFill>
         </p:spPr>
+        <p:txBody>
+          <a:bodyPr/>
+          <a:p/>
+        </p:txBody>
       </p:sp>
       <p:sp>
         <p:nvSpPr>
@@ -9325,6 +9016,10 @@
             </a:stretch>
           </a:blipFill>
         </p:spPr>
+        <p:txBody>
+          <a:bodyPr/>
+          <a:p/>
+        </p:txBody>
       </p:sp>
       <p:sp>
         <p:nvSpPr>
@@ -9377,6 +9072,10 @@
             </a:stretch>
           </a:blipFill>
         </p:spPr>
+        <p:txBody>
+          <a:bodyPr/>
+          <a:p/>
+        </p:txBody>
       </p:sp>
       <p:sp>
         <p:nvSpPr>
@@ -9429,6 +9128,10 @@
             </a:stretch>
           </a:blipFill>
         </p:spPr>
+        <p:txBody>
+          <a:bodyPr/>
+          <a:p/>
+        </p:txBody>
       </p:sp>
       <p:sp>
         <p:nvSpPr>
@@ -9481,6 +9184,10 @@
             </a:stretch>
           </a:blipFill>
         </p:spPr>
+        <p:txBody>
+          <a:bodyPr/>
+          <a:p/>
+        </p:txBody>
       </p:sp>
       <p:sp>
         <p:nvSpPr>
@@ -9533,6 +9240,10 @@
             </a:stretch>
           </a:blipFill>
         </p:spPr>
+        <p:txBody>
+          <a:bodyPr/>
+          <a:p/>
+        </p:txBody>
       </p:sp>
       <p:sp>
         <p:nvSpPr>
@@ -9585,6 +9296,10 @@
             </a:stretch>
           </a:blipFill>
         </p:spPr>
+        <p:txBody>
+          <a:bodyPr/>
+          <a:p/>
+        </p:txBody>
       </p:sp>
       <p:sp>
         <p:nvSpPr>
@@ -9606,25 +9321,7 @@
             <a:spAutoFit/>
           </a:bodyPr>
           <a:lstStyle/>
-          <a:p>
-            <a:pPr algn="ctr">
-              <a:lnSpc>
-                <a:spcPts val="7531"/>
-              </a:lnSpc>
-            </a:pPr>
-            <a:r>
-              <a:rPr lang="en-US" b="true" sz="8462">
-                <a:solidFill>
-                  <a:srgbClr val="034697"/>
-                </a:solidFill>
-                <a:latin typeface="Futura Bold"/>
-                <a:ea typeface="Futura Bold"/>
-                <a:cs typeface="Futura Bold"/>
-                <a:sym typeface="Futura Bold"/>
-              </a:rPr>
-              <a:t>HYPOTHESIS 2</a:t>
-            </a:r>
-          </a:p>
+          <a:p/>
         </p:txBody>
       </p:sp>
       <p:grpSp>
@@ -9705,25 +9402,7 @@
             <a:spAutoFit/>
           </a:bodyPr>
           <a:lstStyle/>
-          <a:p>
-            <a:pPr algn="l">
-              <a:lnSpc>
-                <a:spcPts val="4480"/>
-              </a:lnSpc>
-            </a:pPr>
-            <a:r>
-              <a:rPr lang="en-US" sz="3200">
-                <a:solidFill>
-                  <a:srgbClr val="034697"/>
-                </a:solidFill>
-                <a:latin typeface="Varela Round"/>
-                <a:ea typeface="Varela Round"/>
-                <a:cs typeface="Varela Round"/>
-                <a:sym typeface="Varela Round"/>
-              </a:rPr>
-              <a:t>Lorem ipsum dolor sit amet, consectetur adipiscing elit, sed do eiusmod tempor incididunt ut labore et dolore magna aliqua. Ut enim ad minim veniam, quis nostrud exercitation ullamco laboris nisi ut aliquip ex ea commodo consequat.</a:t>
-            </a:r>
-          </a:p>
+          <a:p/>
         </p:txBody>
       </p:sp>
     </p:spTree>
@@ -9809,6 +9488,10 @@
             </a:stretch>
           </a:blipFill>
         </p:spPr>
+        <p:txBody>
+          <a:bodyPr/>
+          <a:p/>
+        </p:txBody>
       </p:sp>
       <p:sp>
         <p:nvSpPr>
@@ -9861,6 +9544,10 @@
             </a:stretch>
           </a:blipFill>
         </p:spPr>
+        <p:txBody>
+          <a:bodyPr/>
+          <a:p/>
+        </p:txBody>
       </p:sp>
       <p:sp>
         <p:nvSpPr>
@@ -9913,6 +9600,10 @@
             </a:stretch>
           </a:blipFill>
         </p:spPr>
+        <p:txBody>
+          <a:bodyPr/>
+          <a:p/>
+        </p:txBody>
       </p:sp>
       <p:sp>
         <p:nvSpPr>
@@ -9965,6 +9656,10 @@
             </a:stretch>
           </a:blipFill>
         </p:spPr>
+        <p:txBody>
+          <a:bodyPr/>
+          <a:p/>
+        </p:txBody>
       </p:sp>
       <p:sp>
         <p:nvSpPr>
@@ -10017,6 +9712,10 @@
             </a:stretch>
           </a:blipFill>
         </p:spPr>
+        <p:txBody>
+          <a:bodyPr/>
+          <a:p/>
+        </p:txBody>
       </p:sp>
       <p:sp>
         <p:nvSpPr>
@@ -10069,6 +9768,10 @@
             </a:stretch>
           </a:blipFill>
         </p:spPr>
+        <p:txBody>
+          <a:bodyPr/>
+          <a:p/>
+        </p:txBody>
       </p:sp>
       <p:sp>
         <p:nvSpPr>
@@ -10121,6 +9824,10 @@
             </a:stretch>
           </a:blipFill>
         </p:spPr>
+        <p:txBody>
+          <a:bodyPr/>
+          <a:p/>
+        </p:txBody>
       </p:sp>
       <p:sp>
         <p:nvSpPr>
@@ -10173,6 +9880,10 @@
             </a:stretch>
           </a:blipFill>
         </p:spPr>
+        <p:txBody>
+          <a:bodyPr/>
+          <a:p/>
+        </p:txBody>
       </p:sp>
       <p:sp>
         <p:nvSpPr>
@@ -10194,25 +9905,7 @@
             <a:spAutoFit/>
           </a:bodyPr>
           <a:lstStyle/>
-          <a:p>
-            <a:pPr algn="ctr">
-              <a:lnSpc>
-                <a:spcPts val="7531"/>
-              </a:lnSpc>
-            </a:pPr>
-            <a:r>
-              <a:rPr lang="en-US" b="true" sz="8462">
-                <a:solidFill>
-                  <a:srgbClr val="034697"/>
-                </a:solidFill>
-                <a:latin typeface="Futura Bold"/>
-                <a:ea typeface="Futura Bold"/>
-                <a:cs typeface="Futura Bold"/>
-                <a:sym typeface="Futura Bold"/>
-              </a:rPr>
-              <a:t>HYPOTHESIS 3</a:t>
-            </a:r>
-          </a:p>
+          <a:p/>
         </p:txBody>
       </p:sp>
       <p:sp>
@@ -10235,25 +9928,7 @@
             <a:spAutoFit/>
           </a:bodyPr>
           <a:lstStyle/>
-          <a:p>
-            <a:pPr algn="l">
-              <a:lnSpc>
-                <a:spcPts val="4480"/>
-              </a:lnSpc>
-            </a:pPr>
-            <a:r>
-              <a:rPr lang="en-US" sz="3200">
-                <a:solidFill>
-                  <a:srgbClr val="034697"/>
-                </a:solidFill>
-                <a:latin typeface="Varela Round"/>
-                <a:ea typeface="Varela Round"/>
-                <a:cs typeface="Varela Round"/>
-                <a:sym typeface="Varela Round"/>
-              </a:rPr>
-              <a:t>Lorem ipsum dolor sit amet, consectetur adipiscing elit, sed do eiusmod tempor incididunt ut labore et dolore magna aliqua. Ut enim ad minim veniam, quis nostrud exercitation ullamco laboris nisi ut aliquip ex ea commodo consequat.</a:t>
-            </a:r>
-          </a:p>
+          <a:p/>
         </p:txBody>
       </p:sp>
       <p:grpSp>
